--- a/curso/pptx/S47.pptx
+++ b/curso/pptx/S47.pptx
@@ -3890,8 +3890,8 @@
         </p:nvSpPr>
         <p:spPr>
           <a:xfrm>
-            <a:off x="640000" y="420000"/>
-            <a:ext cx="10912000" cy="420000"/>
+            <a:off x="10652000" y="380000"/>
+            <a:ext cx="900000" cy="800000"/>
           </a:xfrm>
           <a:prstGeom prst="rect">
             <a:avLst/>
@@ -3906,17 +3906,17 @@
           <a:p>
             <a:pPr>
               <a:spcAft>
-                <a:spcPts val="810"/>
+                <a:spcPts val="1980"/>
               </a:spcAft>
             </a:pPr>
             <a:r>
-              <a:rPr sz="1800" b="1">
+              <a:rPr sz="4400" b="0">
                 <a:solidFill>
                   <a:srgbClr val="1F2A44"/>
                 </a:solidFill>
                 <a:latin typeface="Nunito Sans"/>
               </a:rPr>
-              <a:t>🦉 Aula de Filosofía</a:t>
+              <a:t>🙃</a:t>
             </a:r>
           </a:p>
         </p:txBody>

--- a/curso/pptx/S47.pptx
+++ b/curso/pptx/S47.pptx
@@ -471,426 +471,6 @@
     </a:lvl9pPr>
   </p:notesStyle>
 </p:notesMaster>
-</file>
-
-<file path=ppt/notesSlides/notesSlide1.xml><?xml version="1.0" encoding="utf-8"?>
-<p:notes xmlns:a="http://schemas.openxmlformats.org/drawingml/2006/main" xmlns:p="http://schemas.openxmlformats.org/presentationml/2006/main" xmlns:r="http://schemas.openxmlformats.org/officeDocument/2006/relationships">
-  <p:cSld>
-    <p:spTree>
-      <p:nvGrpSpPr>
-        <p:cNvPr id="1" name=""/>
-        <p:cNvGrpSpPr/>
-        <p:nvPr/>
-      </p:nvGrpSpPr>
-      <p:grpSpPr>
-        <a:xfrm>
-          <a:off x="0" y="0"/>
-          <a:ext cx="0" cy="0"/>
-          <a:chOff x="0" y="0"/>
-          <a:chExt cx="0" cy="0"/>
-        </a:xfrm>
-      </p:grpSpPr>
-      <p:sp>
-        <p:nvSpPr>
-          <p:cNvPr id="2" name="Slide Image Placeholder 1"/>
-          <p:cNvSpPr>
-            <a:spLocks noGrp="1"/>
-          </p:cNvSpPr>
-          <p:nvPr>
-            <p:ph type="sldImg" idx="2"/>
-          </p:nvPr>
-        </p:nvSpPr>
-        <p:spPr/>
-      </p:sp>
-      <p:sp>
-        <p:nvSpPr>
-          <p:cNvPr id="3" name="Notes Placeholder 2"/>
-          <p:cNvSpPr>
-            <a:spLocks noGrp="1"/>
-          </p:cNvSpPr>
-          <p:nvPr>
-            <p:ph type="body" idx="3" sz="quarter"/>
-          </p:nvPr>
-        </p:nvSpPr>
-        <p:spPr/>
-        <p:txBody>
-          <a:bodyPr/>
-          <a:lstStyle/>
-          <a:p>
-            <a:r>
-              <a:t>3 minutos. Sin apuntes. Es para recordar, no cuenta para nota.</a:t>
-            </a:r>
-          </a:p>
-        </p:txBody>
-      </p:sp>
-      <p:sp>
-        <p:nvSpPr>
-          <p:cNvPr id="4" name="Slide Number Placeholder 3"/>
-          <p:cNvSpPr>
-            <a:spLocks noGrp="1"/>
-          </p:cNvSpPr>
-          <p:nvPr>
-            <p:ph type="sldNum" idx="5" sz="quarter"/>
-          </p:nvPr>
-        </p:nvSpPr>
-        <p:spPr/>
-      </p:sp>
-    </p:spTree>
-  </p:cSld>
-  <p:clrMapOvr>
-    <a:masterClrMapping/>
-  </p:clrMapOvr>
-</p:notes>
-</file>
-
-<file path=ppt/notesSlides/notesSlide2.xml><?xml version="1.0" encoding="utf-8"?>
-<p:notes xmlns:a="http://schemas.openxmlformats.org/drawingml/2006/main" xmlns:p="http://schemas.openxmlformats.org/presentationml/2006/main" xmlns:r="http://schemas.openxmlformats.org/officeDocument/2006/relationships">
-  <p:cSld>
-    <p:spTree>
-      <p:nvGrpSpPr>
-        <p:cNvPr id="1" name=""/>
-        <p:cNvGrpSpPr/>
-        <p:nvPr/>
-      </p:nvGrpSpPr>
-      <p:grpSpPr>
-        <a:xfrm>
-          <a:off x="0" y="0"/>
-          <a:ext cx="0" cy="0"/>
-          <a:chOff x="0" y="0"/>
-          <a:chExt cx="0" cy="0"/>
-        </a:xfrm>
-      </p:grpSpPr>
-      <p:sp>
-        <p:nvSpPr>
-          <p:cNvPr id="2" name="Slide Image Placeholder 1"/>
-          <p:cNvSpPr>
-            <a:spLocks noGrp="1"/>
-          </p:cNvSpPr>
-          <p:nvPr>
-            <p:ph type="sldImg" idx="2"/>
-          </p:nvPr>
-        </p:nvSpPr>
-        <p:spPr/>
-      </p:sp>
-      <p:sp>
-        <p:nvSpPr>
-          <p:cNvPr id="3" name="Notes Placeholder 2"/>
-          <p:cNvSpPr>
-            <a:spLocks noGrp="1"/>
-          </p:cNvSpPr>
-          <p:nvPr>
-            <p:ph type="body" idx="3" sz="quarter"/>
-          </p:nvPr>
-        </p:nvSpPr>
-        <p:spPr/>
-        <p:txBody>
-          <a:bodyPr/>
-          <a:lstStyle/>
-          <a:p>
-            <a:r>
-              <a:t>3 minutos. Sin apuntes. Es para recordar, no cuenta para nota.</a:t>
-            </a:r>
-          </a:p>
-        </p:txBody>
-      </p:sp>
-      <p:sp>
-        <p:nvSpPr>
-          <p:cNvPr id="4" name="Slide Number Placeholder 3"/>
-          <p:cNvSpPr>
-            <a:spLocks noGrp="1"/>
-          </p:cNvSpPr>
-          <p:nvPr>
-            <p:ph type="sldNum" idx="5" sz="quarter"/>
-          </p:nvPr>
-        </p:nvSpPr>
-        <p:spPr/>
-      </p:sp>
-    </p:spTree>
-  </p:cSld>
-  <p:clrMapOvr>
-    <a:masterClrMapping/>
-  </p:clrMapOvr>
-</p:notes>
-</file>
-
-<file path=ppt/notesSlides/notesSlide3.xml><?xml version="1.0" encoding="utf-8"?>
-<p:notes xmlns:a="http://schemas.openxmlformats.org/drawingml/2006/main" xmlns:p="http://schemas.openxmlformats.org/presentationml/2006/main" xmlns:r="http://schemas.openxmlformats.org/officeDocument/2006/relationships">
-  <p:cSld>
-    <p:spTree>
-      <p:nvGrpSpPr>
-        <p:cNvPr id="1" name=""/>
-        <p:cNvGrpSpPr/>
-        <p:nvPr/>
-      </p:nvGrpSpPr>
-      <p:grpSpPr>
-        <a:xfrm>
-          <a:off x="0" y="0"/>
-          <a:ext cx="0" cy="0"/>
-          <a:chOff x="0" y="0"/>
-          <a:chExt cx="0" cy="0"/>
-        </a:xfrm>
-      </p:grpSpPr>
-      <p:sp>
-        <p:nvSpPr>
-          <p:cNvPr id="2" name="Slide Image Placeholder 1"/>
-          <p:cNvSpPr>
-            <a:spLocks noGrp="1"/>
-          </p:cNvSpPr>
-          <p:nvPr>
-            <p:ph type="sldImg" idx="2"/>
-          </p:nvPr>
-        </p:nvSpPr>
-        <p:spPr/>
-      </p:sp>
-      <p:sp>
-        <p:nvSpPr>
-          <p:cNvPr id="3" name="Notes Placeholder 2"/>
-          <p:cNvSpPr>
-            <a:spLocks noGrp="1"/>
-          </p:cNvSpPr>
-          <p:nvPr>
-            <p:ph type="body" idx="3" sz="quarter"/>
-          </p:nvPr>
-        </p:nvSpPr>
-        <p:spPr/>
-        <p:txBody>
-          <a:bodyPr/>
-          <a:lstStyle/>
-          <a:p>
-            <a:r>
-              <a:t>Nadie tiene que contestar: solo pensarlo.</a:t>
-            </a:r>
-          </a:p>
-        </p:txBody>
-      </p:sp>
-      <p:sp>
-        <p:nvSpPr>
-          <p:cNvPr id="4" name="Slide Number Placeholder 3"/>
-          <p:cNvSpPr>
-            <a:spLocks noGrp="1"/>
-          </p:cNvSpPr>
-          <p:nvPr>
-            <p:ph type="sldNum" idx="5" sz="quarter"/>
-          </p:nvPr>
-        </p:nvSpPr>
-        <p:spPr/>
-      </p:sp>
-    </p:spTree>
-  </p:cSld>
-  <p:clrMapOvr>
-    <a:masterClrMapping/>
-  </p:clrMapOvr>
-</p:notes>
-</file>
-
-<file path=ppt/notesSlides/notesSlide4.xml><?xml version="1.0" encoding="utf-8"?>
-<p:notes xmlns:a="http://schemas.openxmlformats.org/drawingml/2006/main" xmlns:p="http://schemas.openxmlformats.org/presentationml/2006/main" xmlns:r="http://schemas.openxmlformats.org/officeDocument/2006/relationships">
-  <p:cSld>
-    <p:spTree>
-      <p:nvGrpSpPr>
-        <p:cNvPr id="1" name=""/>
-        <p:cNvGrpSpPr/>
-        <p:nvPr/>
-      </p:nvGrpSpPr>
-      <p:grpSpPr>
-        <a:xfrm>
-          <a:off x="0" y="0"/>
-          <a:ext cx="0" cy="0"/>
-          <a:chOff x="0" y="0"/>
-          <a:chExt cx="0" cy="0"/>
-        </a:xfrm>
-      </p:grpSpPr>
-      <p:sp>
-        <p:nvSpPr>
-          <p:cNvPr id="2" name="Slide Image Placeholder 1"/>
-          <p:cNvSpPr>
-            <a:spLocks noGrp="1"/>
-          </p:cNvSpPr>
-          <p:nvPr>
-            <p:ph type="sldImg" idx="2"/>
-          </p:nvPr>
-        </p:nvSpPr>
-        <p:spPr/>
-      </p:sp>
-      <p:sp>
-        <p:nvSpPr>
-          <p:cNvPr id="3" name="Notes Placeholder 2"/>
-          <p:cNvSpPr>
-            <a:spLocks noGrp="1"/>
-          </p:cNvSpPr>
-          <p:nvPr>
-            <p:ph type="body" idx="3" sz="quarter"/>
-          </p:nvPr>
-        </p:nvSpPr>
-        <p:spPr/>
-        <p:txBody>
-          <a:bodyPr/>
-          <a:lstStyle/>
-          <a:p>
-            <a:r>
-              <a:t>Dejar unos segundos para que piensen la respuesta fácil antes de enseñar los pasos.</a:t>
-            </a:r>
-          </a:p>
-        </p:txBody>
-      </p:sp>
-      <p:sp>
-        <p:nvSpPr>
-          <p:cNvPr id="4" name="Slide Number Placeholder 3"/>
-          <p:cNvSpPr>
-            <a:spLocks noGrp="1"/>
-          </p:cNvSpPr>
-          <p:nvPr>
-            <p:ph type="sldNum" idx="5" sz="quarter"/>
-          </p:nvPr>
-        </p:nvSpPr>
-        <p:spPr/>
-      </p:sp>
-    </p:spTree>
-  </p:cSld>
-  <p:clrMapOvr>
-    <a:masterClrMapping/>
-  </p:clrMapOvr>
-</p:notes>
-</file>
-
-<file path=ppt/notesSlides/notesSlide5.xml><?xml version="1.0" encoding="utf-8"?>
-<p:notes xmlns:a="http://schemas.openxmlformats.org/drawingml/2006/main" xmlns:p="http://schemas.openxmlformats.org/presentationml/2006/main" xmlns:r="http://schemas.openxmlformats.org/officeDocument/2006/relationships">
-  <p:cSld>
-    <p:spTree>
-      <p:nvGrpSpPr>
-        <p:cNvPr id="1" name=""/>
-        <p:cNvGrpSpPr/>
-        <p:nvPr/>
-      </p:nvGrpSpPr>
-      <p:grpSpPr>
-        <a:xfrm>
-          <a:off x="0" y="0"/>
-          <a:ext cx="0" cy="0"/>
-          <a:chOff x="0" y="0"/>
-          <a:chExt cx="0" cy="0"/>
-        </a:xfrm>
-      </p:grpSpPr>
-      <p:sp>
-        <p:nvSpPr>
-          <p:cNvPr id="2" name="Slide Image Placeholder 1"/>
-          <p:cNvSpPr>
-            <a:spLocks noGrp="1"/>
-          </p:cNvSpPr>
-          <p:nvPr>
-            <p:ph type="sldImg" idx="2"/>
-          </p:nvPr>
-        </p:nvSpPr>
-        <p:spPr/>
-      </p:sp>
-      <p:sp>
-        <p:nvSpPr>
-          <p:cNvPr id="3" name="Notes Placeholder 2"/>
-          <p:cNvSpPr>
-            <a:spLocks noGrp="1"/>
-          </p:cNvSpPr>
-          <p:nvPr>
-            <p:ph type="body" idx="3" sz="quarter"/>
-          </p:nvPr>
-        </p:nvSpPr>
-        <p:spPr/>
-        <p:txBody>
-          <a:bodyPr/>
-          <a:lstStyle/>
-          <a:p>
-            <a:r>
-              <a:t>Dejar 2 minutos para que lo escriban. La diapositiva siguiente muestra el resumen.</a:t>
-            </a:r>
-          </a:p>
-        </p:txBody>
-      </p:sp>
-      <p:sp>
-        <p:nvSpPr>
-          <p:cNvPr id="4" name="Slide Number Placeholder 3"/>
-          <p:cNvSpPr>
-            <a:spLocks noGrp="1"/>
-          </p:cNvSpPr>
-          <p:nvPr>
-            <p:ph type="sldNum" idx="5" sz="quarter"/>
-          </p:nvPr>
-        </p:nvSpPr>
-        <p:spPr/>
-      </p:sp>
-    </p:spTree>
-  </p:cSld>
-  <p:clrMapOvr>
-    <a:masterClrMapping/>
-  </p:clrMapOvr>
-</p:notes>
-</file>
-
-<file path=ppt/notesSlides/notesSlide6.xml><?xml version="1.0" encoding="utf-8"?>
-<p:notes xmlns:a="http://schemas.openxmlformats.org/drawingml/2006/main" xmlns:p="http://schemas.openxmlformats.org/presentationml/2006/main" xmlns:r="http://schemas.openxmlformats.org/officeDocument/2006/relationships">
-  <p:cSld>
-    <p:spTree>
-      <p:nvGrpSpPr>
-        <p:cNvPr id="1" name=""/>
-        <p:cNvGrpSpPr/>
-        <p:nvPr/>
-      </p:nvGrpSpPr>
-      <p:grpSpPr>
-        <a:xfrm>
-          <a:off x="0" y="0"/>
-          <a:ext cx="0" cy="0"/>
-          <a:chOff x="0" y="0"/>
-          <a:chExt cx="0" cy="0"/>
-        </a:xfrm>
-      </p:grpSpPr>
-      <p:sp>
-        <p:nvSpPr>
-          <p:cNvPr id="2" name="Slide Image Placeholder 1"/>
-          <p:cNvSpPr>
-            <a:spLocks noGrp="1"/>
-          </p:cNvSpPr>
-          <p:nvPr>
-            <p:ph type="sldImg" idx="2"/>
-          </p:nvPr>
-        </p:nvSpPr>
-        <p:spPr/>
-      </p:sp>
-      <p:sp>
-        <p:nvSpPr>
-          <p:cNvPr id="3" name="Notes Placeholder 2"/>
-          <p:cNvSpPr>
-            <a:spLocks noGrp="1"/>
-          </p:cNvSpPr>
-          <p:nvPr>
-            <p:ph type="body" idx="3" sz="quarter"/>
-          </p:nvPr>
-        </p:nvSpPr>
-        <p:spPr/>
-        <p:txBody>
-          <a:bodyPr/>
-          <a:lstStyle/>
-          <a:p>
-            <a:r>
-              <a:t>Buscar: «efecto Dunning-Kruger explicado» · «ilusión de profundidad explicativa»</a:t>
-            </a:r>
-          </a:p>
-        </p:txBody>
-      </p:sp>
-      <p:sp>
-        <p:nvSpPr>
-          <p:cNvPr id="4" name="Slide Number Placeholder 3"/>
-          <p:cNvSpPr>
-            <a:spLocks noGrp="1"/>
-          </p:cNvSpPr>
-          <p:nvPr>
-            <p:ph type="sldNum" idx="5" sz="quarter"/>
-          </p:nvPr>
-        </p:nvSpPr>
-        <p:spPr/>
-      </p:sp>
-    </p:spTree>
-  </p:cSld>
-  <p:clrMapOvr>
-    <a:masterClrMapping/>
-  </p:clrMapOvr>
-</p:notes>
 </file>
 
 <file path=ppt/slideLayouts/slideLayout1.xml><?xml version="1.0" encoding="utf-8"?>

--- a/curso/pptx/S47.pptx
+++ b/curso/pptx/S47.pptx
@@ -3799,7 +3799,7 @@
                 </a:solidFill>
                 <a:latin typeface="Nunito Sans"/>
               </a:rPr>
-              <a:t>Iker: «El examen de mañana me lo sé. Lo he leído una vez y lo entiendo todo».</a:t>
+              <a:t>Un chico: «El examen de mañana me lo sé. Lo he leído una vez y lo entiendo todo».</a:t>
             </a:r>
           </a:p>
         </p:txBody>
@@ -4417,7 +4417,7 @@
                 </a:solidFill>
                 <a:latin typeface="Nunito Sans"/>
               </a:rPr>
-              <a:t>Chen: «El trabajo lo hago el domingo por la tarde, en dos horas». Siempre dice lo mismo, y siempre acaba de noche.</a:t>
+              <a:t>Un chico: «El trabajo lo hago el domingo por la tarde, en dos horas». Siempre dice lo mismo, y siempre acaba de noche.</a:t>
             </a:r>
           </a:p>
         </p:txBody>
@@ -4465,7 +4465,7 @@
                 </a:solidFill>
                 <a:latin typeface="Nunito Sans"/>
               </a:rPr>
-              <a:t>Chen planea como si todo fuera a salir perfecto.</a:t>
+              <a:t>Ese chico planea como si todo fuera a salir perfecto.</a:t>
             </a:r>
           </a:p>
           <a:p>
@@ -4726,7 +4726,7 @@
                 </a:solidFill>
                 <a:latin typeface="Nunito Sans"/>
               </a:rPr>
-              <a:t>Aitor es portero federado desde hace tres años. Dice: «En los penaltis del recreo paro más que nadie de la clase». Lo demuestra cada semana.</a:t>
+              <a:t>Un chico es portero federado desde hace tres años. Dice: «En los penaltis del recreo paro más que nadie de la clase». Lo demuestra cada semana.</a:t>
             </a:r>
           </a:p>
         </p:txBody>
@@ -6434,7 +6434,7 @@
                 </a:solidFill>
                 <a:latin typeface="Nunito Sans"/>
               </a:rPr>
-              <a:t>Iker: «El examen de mañana me lo sé. Lo he leído una vez y lo entiendo todo».</a:t>
+              <a:t>Un chico: «El examen de mañana me lo sé. Lo he leído una vez y lo entiendo todo».</a:t>
             </a:r>
           </a:p>
         </p:txBody>

--- a/curso/pptx/S47.pptx
+++ b/curso/pptx/S47.pptx
@@ -3574,7 +3574,7 @@
                 </a:solidFill>
                 <a:latin typeface="Fredoka"/>
               </a:rPr>
-              <a:t>Exceso de confianza</a:t>
+              <a:t>Anclaje y encuadre</a:t>
             </a:r>
           </a:p>
         </p:txBody>
@@ -3613,7 +3613,7 @@
                 </a:solidFill>
                 <a:latin typeface="Nunito Sans"/>
               </a:rPr>
-              <a:t>El exceso de confianza es creer que sabemos o hacemos algo mejor de lo que de verdad lo sabemos o lo hacemos.</a:t>
+              <a:t>El primer número que oímos (anclaje) y la forma de decir algo (encuadre) cambian nuestra decisión, aunque los datos sean los mismos.</a:t>
             </a:r>
           </a:p>
         </p:txBody>
@@ -3717,7 +3717,7 @@
                 </a:solidFill>
                 <a:latin typeface="Fredoka"/>
               </a:rPr>
-              <a:t>Caso 1 · El examen del principio</a:t>
+              <a:t>Caso 1 · La rueda de la fortuna</a:t>
             </a:r>
           </a:p>
         </p:txBody>
@@ -3799,7 +3799,7 @@
                 </a:solidFill>
                 <a:latin typeface="Nunito Sans"/>
               </a:rPr>
-              <a:t>Un chico: «El examen de mañana me lo sé. Lo he leído una vez y lo entiendo todo».</a:t>
+              <a:t>Experimento de Tversky y Kahneman (1974). Giraban una rueda trucada que paraba en 10 o en 65. Luego preguntaban: «¿Qué porcentaje de países de la ONU son africanos?».</a:t>
             </a:r>
           </a:p>
         </p:txBody>
@@ -3847,7 +3847,7 @@
                 </a:solidFill>
                 <a:latin typeface="Nunito Sans"/>
               </a:rPr>
-              <a:t>Leer una vez da la sensación de «me suena». No es lo mismo que saberlo.</a:t>
+              <a:t>La rueda no tenía nada que ver con la pregunta, y todos lo veían.</a:t>
             </a:r>
           </a:p>
           <a:p>
@@ -3872,7 +3872,7 @@
                 </a:solidFill>
                 <a:latin typeface="Nunito Sans"/>
               </a:rPr>
-              <a:t>La prueba: cerrar el libro y explicarlo sin mirar.</a:t>
+              <a:t>Aun así, entre los que vieron el 10, la respuesta típica fue un 25 %.</a:t>
             </a:r>
           </a:p>
           <a:p>
@@ -3897,7 +3897,7 @@
                 </a:solidFill>
                 <a:latin typeface="Nunito Sans"/>
               </a:rPr>
-              <a:t>Si no puede explicarlo, su confianza era mayor que lo que sabía.</a:t>
+              <a:t>Entre los que vieron el 65, la respuesta típica fue un 45 %.</a:t>
             </a:r>
           </a:p>
           <a:p>
@@ -3922,7 +3922,7 @@
                 </a:solidFill>
                 <a:latin typeface="Nunito Sans"/>
               </a:rPr>
-              <a:t>Conclusión: la mejor medicina contra el exceso de confianza es ponerse a prueba.</a:t>
+              <a:t>Conclusión: un número al azar sirvió de ancla y movió la respuesta.</a:t>
             </a:r>
           </a:p>
         </p:txBody>
@@ -4026,7 +4026,7 @@
                 </a:solidFill>
                 <a:latin typeface="Fredoka"/>
               </a:rPr>
-              <a:t>Caso 2 · ¿Cómo funciona una cremallera?</a:t>
+              <a:t>Caso 2 · Las zapatillas del principio</a:t>
             </a:r>
           </a:p>
         </p:txBody>
@@ -4108,7 +4108,7 @@
                 </a:solidFill>
                 <a:latin typeface="Nunito Sans"/>
               </a:rPr>
-              <a:t>Estudio de Rozenblit y Keil (2002). Preguntaban a la gente si entendía cómo funciona una cremallera. Luego le pedían explicarlo paso a paso.</a:t>
+              <a:t>Tienda 1: «Antes 180 €. Ahora 90 €». Tienda 2: «90 €». Son las mismas zapatillas. (Ejemplo inventado.)</a:t>
             </a:r>
           </a:p>
         </p:txBody>
@@ -4156,7 +4156,7 @@
                 </a:solidFill>
                 <a:latin typeface="Nunito Sans"/>
               </a:rPr>
-              <a:t>Antes de explicarlo, mucha gente se daba una nota bastante alta.</a:t>
+              <a:t>«Antes 180 €» es el ancla: me hace sentir que 90 € es una ganga.</a:t>
             </a:r>
           </a:p>
           <a:p>
@@ -4181,7 +4181,7 @@
                 </a:solidFill>
                 <a:latin typeface="Nunito Sans"/>
               </a:rPr>
-              <a:t>Al intentar explicarlo paso a paso, se atascaba.</a:t>
+              <a:t>La tienda 2 no pone ancla: 90 € parece solo un precio.</a:t>
             </a:r>
           </a:p>
           <a:p>
@@ -4206,7 +4206,7 @@
                 </a:solidFill>
                 <a:latin typeface="Nunito Sans"/>
               </a:rPr>
-              <a:t>Después, ellos mismos bajaban su nota.</a:t>
+              <a:t>Las zapatillas cuestan lo mismo en las dos tiendas.</a:t>
             </a:r>
           </a:p>
           <a:p>
@@ -4231,7 +4231,7 @@
                 </a:solidFill>
                 <a:latin typeface="Nunito Sans"/>
               </a:rPr>
-              <a:t>Conclusión: creemos entender cosas que solo conocemos «de vista». Explicarlas nos pone a prueba.</a:t>
+              <a:t>Conclusión: me pregunto «¿cuánto pagaría si no hubiera visto el primer precio?».</a:t>
             </a:r>
           </a:p>
         </p:txBody>
@@ -4335,7 +4335,7 @@
                 </a:solidFill>
                 <a:latin typeface="Fredoka"/>
               </a:rPr>
-              <a:t>Caso 3 · El trabajo de Historia</a:t>
+              <a:t>Caso 3 · Dos maneras de decirlo</a:t>
             </a:r>
           </a:p>
         </p:txBody>
@@ -4417,7 +4417,7 @@
                 </a:solidFill>
                 <a:latin typeface="Nunito Sans"/>
               </a:rPr>
-              <a:t>Un chico: «El trabajo lo hago el domingo por la tarde, en dos horas». Siempre dice lo mismo, y siempre acaba de noche.</a:t>
+              <a:t>Un médico explica una operación: «El 90 % sobrevive». Otro médico explica la misma operación: «El 10 % muere».</a:t>
             </a:r>
           </a:p>
         </p:txBody>
@@ -4465,7 +4465,7 @@
                 </a:solidFill>
                 <a:latin typeface="Nunito Sans"/>
               </a:rPr>
-              <a:t>Ese chico planea como si todo fuera a salir perfecto.</a:t>
+              <a:t>¿Los datos son distintos? No: de cada 100 personas, 90 viven y 10 mueren.</a:t>
             </a:r>
           </a:p>
           <a:p>
@@ -4490,7 +4490,7 @@
                 </a:solidFill>
                 <a:latin typeface="Nunito Sans"/>
               </a:rPr>
-              <a:t>No cuenta con imprevistos: buscar información, un fallo del ordenador, cansarse.</a:t>
+              <a:t>Pero «sobrevive» suena a esperanza y «muere» suena a miedo.</a:t>
             </a:r>
           </a:p>
           <a:p>
@@ -4515,7 +4515,7 @@
                 </a:solidFill>
                 <a:latin typeface="Nunito Sans"/>
               </a:rPr>
-              <a:t>Sabe que otras veces tardó más, pero no lo tiene en cuenta.</a:t>
+              <a:t>En estudios reales, con «el 90 % sobrevive» más personas eligen operarse, también médicos.</a:t>
             </a:r>
           </a:p>
           <a:p>
@@ -4540,7 +4540,7 @@
                 </a:solidFill>
                 <a:latin typeface="Nunito Sans"/>
               </a:rPr>
-              <a:t>Conclusión: exceso de confianza al planear. Mira cuánto tardaste otras veces y añade margen.</a:t>
+              <a:t>Conclusión: encuadre. Antes de decidir, di el dato de las dos formas.</a:t>
             </a:r>
           </a:p>
         </p:txBody>
@@ -4644,7 +4644,7 @@
                 </a:solidFill>
                 <a:latin typeface="Fredoka"/>
               </a:rPr>
-              <a:t>⚠ ¿Seguro de más?</a:t>
+              <a:t>⚠ ¿Anclado?</a:t>
             </a:r>
           </a:p>
         </p:txBody>
@@ -4726,7 +4726,7 @@
                 </a:solidFill>
                 <a:latin typeface="Nunito Sans"/>
               </a:rPr>
-              <a:t>Un chico es portero federado desde hace tres años. Dice: «En los penaltis del recreo paro más que nadie de la clase». Lo demuestra cada semana.</a:t>
+              <a:t>Un chico quiere vender su bici usada. Antes de poner precio, mira cuánto piden por bicis iguales en internet: unos 150 €. Pone 140 €.</a:t>
             </a:r>
           </a:p>
         </p:txBody>
@@ -4774,7 +4774,7 @@
                 </a:solidFill>
                 <a:latin typeface="Nunito Sans"/>
               </a:rPr>
-              <a:t>Está muy seguro de ser mejor que la mayoría… ¿exceso de confianza?</a:t>
+              <a:t>Se ha fijado en un primer número… ¿es anclaje?</a:t>
             </a:r>
           </a:p>
           <a:p>
@@ -4799,7 +4799,7 @@
                 </a:solidFill>
                 <a:latin typeface="Nunito Sans"/>
               </a:rPr>
-              <a:t>Parece que sí: «soy mejor que la mayoría» es la frase típica.</a:t>
+              <a:t>Parece que sí: un número (150 €) ha decidido su precio.</a:t>
             </a:r>
           </a:p>
           <a:p>
@@ -4824,7 +4824,7 @@
                 </a:solidFill>
                 <a:latin typeface="Nunito Sans"/>
               </a:rPr>
-              <a:t>Pero miro las pruebas: entrena, y lo ha demostrado muchas veces delante de todos.</a:t>
+              <a:t>Pero ese número no sale al azar: es lo que cuestan de verdad bicis iguales.</a:t>
             </a:r>
           </a:p>
           <a:p>
@@ -4849,7 +4849,7 @@
                 </a:solidFill>
                 <a:latin typeface="Nunito Sans"/>
               </a:rPr>
-              <a:t>El exceso de confianza es estar más seguro de lo que dicen las pruebas. Aquí las pruebas le dan la razón.</a:t>
+              <a:t>Comparar con precios reales es informarse. El anclaje es dejarse mover por un número que no viene a cuento o es inventado.</a:t>
             </a:r>
           </a:p>
           <a:p>
@@ -4874,7 +4874,7 @@
                 </a:solidFill>
                 <a:latin typeface="Nunito Sans"/>
               </a:rPr>
-              <a:t>Conclusión: estar seguro con pruebas no es un sesgo. Y también se falla al revés: creer que sabes menos.</a:t>
+              <a:t>Conclusión: no todo número que usamos es un ancla. Pregunta: ¿este número tiene que ver con lo que decido?</a:t>
             </a:r>
           </a:p>
         </p:txBody>
@@ -5130,7 +5130,7 @@
                 </a:solidFill>
                 <a:latin typeface="Nunito Sans"/>
               </a:rPr>
-              <a:t>El exceso de confianza es creer que sabemos más de lo que sabemos.</a:t>
+              <a:t>Anclaje: el primer número que oímos influye en cómo juzgamos los siguientes.</a:t>
             </a:r>
           </a:p>
           <a:p>
@@ -5155,7 +5155,7 @@
                 </a:solidFill>
                 <a:latin typeface="Nunito Sans"/>
               </a:rPr>
-              <a:t>Quien sabe poco de algo a menudo no ve sus propios errores.</a:t>
+              <a:t>Encuadre: la forma de decir un dato cambia lo que elegimos.</a:t>
             </a:r>
           </a:p>
           <a:p>
@@ -5180,7 +5180,7 @@
                 </a:solidFill>
                 <a:latin typeface="Nunito Sans"/>
               </a:rPr>
-              <a:t>Ponerse a prueba, explicar sin mirar y comprobar es la mejor medicina.</a:t>
+              <a:t>Antes de decidir, quita el ancla y di el dato de las dos formas.</a:t>
             </a:r>
           </a:p>
         </p:txBody>
@@ -5284,7 +5284,7 @@
                 </a:solidFill>
                 <a:latin typeface="Fredoka"/>
               </a:rPr>
-              <a:t>El efecto Dunning-Kruger explicado con cuidado</a:t>
+              <a:t>El efecto anclaje y el efecto encuadre en las compras</a:t>
             </a:r>
           </a:p>
         </p:txBody>
@@ -5323,7 +5323,7 @@
                 </a:solidFill>
                 <a:latin typeface="Nunito Sans"/>
               </a:rPr>
-              <a:t>Ver el estudio contado bien. Ojo: muchos vídeos lo exageran; elige uno riguroso.</a:t>
+              <a:t>Ver cómo usan las tiendas y los anuncios el primer precio y la forma de decir las cosas.</a:t>
             </a:r>
           </a:p>
         </p:txBody>
@@ -5981,7 +5981,7 @@
                 </a:solidFill>
                 <a:latin typeface="Nunito Sans"/>
               </a:rPr>
-              <a:t>Contra el encuadre: antes de decidir, di el dato de las ______ formas.  (sesión 46)</a:t>
+              <a:t>Una primera impresión es una ______, no un juicio final.  (sesión 46)</a:t>
             </a:r>
           </a:p>
           <a:p>
@@ -6006,7 +6006,7 @@
                 </a:solidFill>
                 <a:latin typeface="Nunito Sans"/>
               </a:rPr>
-              <a:t>El ancla es el hierro que sujeta un ______ al fondo.  (sesión 46)</a:t>
+              <a:t>El halo es el círculo de ______ de los santos en los cuadros.  (sesión 46)</a:t>
             </a:r>
           </a:p>
           <a:p>
@@ -6031,7 +6031,7 @@
                 </a:solidFill>
                 <a:latin typeface="Nunito Sans"/>
               </a:rPr>
-              <a:t>Si una imagen te da mucha emoción, ______.  (sesión 35)</a:t>
+              <a:t>La lectura lateral es como trabajan los ______ profesionales.  (sesión 35)</a:t>
             </a:r>
           </a:p>
         </p:txBody>
@@ -6183,7 +6183,7 @@
                 </a:solidFill>
                 <a:latin typeface="Nunito Sans"/>
               </a:rPr>
-              <a:t>Contra el encuadre: antes de decidir, di el dato de las </a:t>
+              <a:t>Una primera impresión es una </a:t>
             </a:r>
             <a:r>
               <a:rPr sz="2600" b="1">
@@ -6192,7 +6192,7 @@
                 </a:solidFill>
                 <a:latin typeface="Nunito Sans"/>
               </a:rPr>
-              <a:t>dos</a:t>
+              <a:t>suposición</a:t>
             </a:r>
             <a:r>
               <a:rPr sz="2600" b="0">
@@ -6201,7 +6201,7 @@
                 </a:solidFill>
                 <a:latin typeface="Nunito Sans"/>
               </a:rPr>
-              <a:t> formas.  (sesión 46)</a:t>
+              <a:t>, no un juicio final.  (sesión 46)</a:t>
             </a:r>
           </a:p>
           <a:p>
@@ -6226,7 +6226,7 @@
                 </a:solidFill>
                 <a:latin typeface="Nunito Sans"/>
               </a:rPr>
-              <a:t>El ancla es el hierro que sujeta un </a:t>
+              <a:t>El halo es el círculo de </a:t>
             </a:r>
             <a:r>
               <a:rPr sz="2600" b="1">
@@ -6235,7 +6235,7 @@
                 </a:solidFill>
                 <a:latin typeface="Nunito Sans"/>
               </a:rPr>
-              <a:t>barco</a:t>
+              <a:t>luz</a:t>
             </a:r>
             <a:r>
               <a:rPr sz="2600" b="0">
@@ -6244,7 +6244,7 @@
                 </a:solidFill>
                 <a:latin typeface="Nunito Sans"/>
               </a:rPr>
-              <a:t> al fondo.  (sesión 46)</a:t>
+              <a:t> de los santos en los cuadros.  (sesión 46)</a:t>
             </a:r>
           </a:p>
           <a:p>
@@ -6269,7 +6269,7 @@
                 </a:solidFill>
                 <a:latin typeface="Nunito Sans"/>
               </a:rPr>
-              <a:t>Si una imagen te da mucha emoción, </a:t>
+              <a:t>La lectura lateral es como trabajan los </a:t>
             </a:r>
             <a:r>
               <a:rPr sz="2600" b="1">
@@ -6278,7 +6278,7 @@
                 </a:solidFill>
                 <a:latin typeface="Nunito Sans"/>
               </a:rPr>
-              <a:t>sospecha</a:t>
+              <a:t>verificadores</a:t>
             </a:r>
             <a:r>
               <a:rPr sz="2600" b="0">
@@ -6287,7 +6287,7 @@
                 </a:solidFill>
                 <a:latin typeface="Nunito Sans"/>
               </a:rPr>
-              <a:t>.  (sesión 35)</a:t>
+              <a:t> profesionales.  (sesión 35)</a:t>
             </a:r>
           </a:p>
         </p:txBody>
@@ -6434,7 +6434,7 @@
                 </a:solidFill>
                 <a:latin typeface="Nunito Sans"/>
               </a:rPr>
-              <a:t>Un chico: «El examen de mañana me lo sé. Lo he leído una vez y lo entiendo todo».</a:t>
+              <a:t>Unas zapatillas: «Antes 180 €. Ahora 90 €». Otras iguales, en otra tienda: «90 €».</a:t>
             </a:r>
           </a:p>
         </p:txBody>
@@ -6473,7 +6473,7 @@
                 </a:solidFill>
                 <a:latin typeface="Nunito Sans"/>
               </a:rPr>
-              <a:t>¿Qué le pedirías para saber si de verdad se lo sabe?</a:t>
+              <a:t>¿Cuáles te parecen más baratas?</a:t>
             </a:r>
           </a:p>
         </p:txBody>
@@ -6577,7 +6577,7 @@
                 </a:solidFill>
                 <a:latin typeface="Fredoka"/>
               </a:rPr>
-              <a:t>Más seguros que sabios</a:t>
+              <a:t>El primer número y la forma de decirlo</a:t>
             </a:r>
           </a:p>
         </p:txBody>
@@ -6642,7 +6642,7 @@
                 </a:solidFill>
                 <a:latin typeface="Nunito Sans"/>
               </a:rPr>
-              <a:t>BLOQUE 1 · MÁS SEGUROS QUE SABIOS</a:t>
+              <a:t>BLOQUE 1 · EL PRIMER NÚMERO Y LA FORMA DE DECIRLO</a:t>
             </a:r>
           </a:p>
         </p:txBody>
@@ -6681,7 +6681,7 @@
                 </a:solidFill>
                 <a:latin typeface="Fredoka"/>
               </a:rPr>
-              <a:t>Exceso de confianza</a:t>
+              <a:t>Anclaje</a:t>
             </a:r>
           </a:p>
         </p:txBody>
@@ -6763,7 +6763,7 @@
                 </a:solidFill>
                 <a:latin typeface="Nunito Sans"/>
               </a:rPr>
-              <a:t>Es estar más seguro de lo que sabemos, o de lo bien que lo hacemos, de lo que dicen las pruebas.</a:t>
+              <a:t>El anclaje es quedarnos enganchados al primer número que oímos y usarlo, sin querer, para decidir.</a:t>
             </a:r>
           </a:p>
         </p:txBody>
@@ -6805,13 +6805,22 @@
               <a:t>• </a:t>
             </a:r>
             <a:r>
+              <a:rPr sz="2800" b="1">
+                <a:solidFill>
+                  <a:srgbClr val="1F2A44"/>
+                </a:solidFill>
+                <a:latin typeface="Nunito Sans"/>
+              </a:rPr>
+              <a:t>Ancla:</a:t>
+            </a:r>
+            <a:r>
               <a:rPr sz="2800" b="0">
                 <a:solidFill>
                   <a:srgbClr val="1F2A44"/>
                 </a:solidFill>
                 <a:latin typeface="Nunito Sans"/>
               </a:rPr>
-              <a:t>Sesión 3: sentirse seguro no es lo mismo que saber</a:t>
+              <a:t> el hierro que sujeta un barco al fondo</a:t>
             </a:r>
           </a:p>
           <a:p>
@@ -6836,7 +6845,7 @@
                 </a:solidFill>
                 <a:latin typeface="Nunito Sans"/>
               </a:rPr>
-              <a:t>Nos pasa a casi todos en algún tema</a:t>
+              <a:t>El primer precio hace que el segundo parezca barato o caro</a:t>
             </a:r>
           </a:p>
           <a:p>
@@ -6861,7 +6870,32 @@
                 </a:solidFill>
                 <a:latin typeface="Nunito Sans"/>
               </a:rPr>
-              <a:t>Es más fácil verlo en los demás que en uno mismo</a:t>
+              <a:t>Funciona incluso si el primer número sale al azar</a:t>
+            </a:r>
+          </a:p>
+          <a:p>
+            <a:pPr>
+              <a:spcAft>
+                <a:spcPts val="1260"/>
+              </a:spcAft>
+            </a:pPr>
+            <a:r>
+              <a:rPr sz="2800" b="1">
+                <a:solidFill>
+                  <a:srgbClr val="E8793A"/>
+                </a:solidFill>
+                <a:latin typeface="Nunito Sans"/>
+              </a:rPr>
+              <a:t>• </a:t>
+            </a:r>
+            <a:r>
+              <a:rPr sz="2800" b="0">
+                <a:solidFill>
+                  <a:srgbClr val="1F2A44"/>
+                </a:solidFill>
+                <a:latin typeface="Nunito Sans"/>
+              </a:rPr>
+              <a:t>Ojo si el número no viene a cuento o es inventado</a:t>
             </a:r>
           </a:p>
         </p:txBody>
@@ -6926,7 +6960,7 @@
                 </a:solidFill>
                 <a:latin typeface="Nunito Sans"/>
               </a:rPr>
-              <a:t>BLOQUE 1 · MÁS SEGUROS QUE SABIOS</a:t>
+              <a:t>BLOQUE 1 · EL PRIMER NÚMERO Y LA FORMA DE DECIRLO</a:t>
             </a:r>
           </a:p>
         </p:txBody>
@@ -6965,221 +6999,200 @@
                 </a:solidFill>
                 <a:latin typeface="Fredoka"/>
               </a:rPr>
-              <a:t>Formas de exceso de confianza</a:t>
-            </a:r>
-          </a:p>
-        </p:txBody>
-      </p:sp>
-      <p:graphicFrame>
-        <p:nvGraphicFramePr>
-          <p:cNvPr id="4" name="Table 3"/>
-          <p:cNvGraphicFramePr>
-            <a:graphicFrameLocks noGrp="1"/>
-          </p:cNvGraphicFramePr>
+              <a:t>Encuadre</a:t>
+            </a:r>
+          </a:p>
+        </p:txBody>
+      </p:sp>
+      <p:sp>
+        <p:nvSpPr>
+          <p:cNvPr id="4" name="Rectangle 3"/>
+          <p:cNvSpPr/>
           <p:nvPr/>
-        </p:nvGraphicFramePr>
-        <p:xfrm>
-          <a:off x="640000" y="1700000"/>
-          <a:ext cx="10912000" cy="2400000"/>
-        </p:xfrm>
-        <a:graphic>
-          <a:graphicData uri="http://schemas.openxmlformats.org/drawingml/2006/table">
-            <a:tbl>
-              <a:tblPr firstRow="1" bandRow="1">
-                <a:tableStyleId>{5C22544A-7EE6-4342-B048-85BDC9FD1C3A}</a:tableStyleId>
-              </a:tblPr>
-              <a:tblGrid>
-                <a:gridCol w="5456000"/>
-                <a:gridCol w="5456000"/>
-              </a:tblGrid>
-              <a:tr h="600000">
-                <a:tc>
-                  <a:txBody>
-                    <a:bodyPr/>
-                    <a:lstStyle/>
-                    <a:p>
-                      <a:r>
-                        <a:rPr sz="2000" b="1">
-                          <a:solidFill>
-                            <a:srgbClr val="FBF7EF"/>
-                          </a:solidFill>
-                          <a:latin typeface="Fredoka"/>
-                        </a:rPr>
-                        <a:t>Forma</a:t>
-                      </a:r>
-                    </a:p>
-                  </a:txBody>
-                  <a:tcPr>
-                    <a:solidFill>
-                      <a:srgbClr val="1F2A44"/>
-                    </a:solidFill>
-                  </a:tcPr>
-                </a:tc>
-                <a:tc>
-                  <a:txBody>
-                    <a:bodyPr/>
-                    <a:lstStyle/>
-                    <a:p>
-                      <a:r>
-                        <a:rPr sz="2000" b="1">
-                          <a:solidFill>
-                            <a:srgbClr val="FBF7EF"/>
-                          </a:solidFill>
-                          <a:latin typeface="Fredoka"/>
-                        </a:rPr>
-                        <a:t>Ejemplo</a:t>
-                      </a:r>
-                    </a:p>
-                  </a:txBody>
-                  <a:tcPr>
-                    <a:solidFill>
-                      <a:srgbClr val="1F2A44"/>
-                    </a:solidFill>
-                  </a:tcPr>
-                </a:tc>
-              </a:tr>
-              <a:tr h="600000">
-                <a:tc>
-                  <a:txBody>
-                    <a:bodyPr/>
-                    <a:lstStyle/>
-                    <a:p>
-                      <a:r>
-                        <a:rPr sz="2000" b="0">
-                          <a:solidFill>
-                            <a:srgbClr val="1F2A44"/>
-                          </a:solidFill>
-                          <a:latin typeface="Nunito Sans"/>
-                        </a:rPr>
-                        <a:t>Creerse mejor que la mayoría</a:t>
-                      </a:r>
-                    </a:p>
-                  </a:txBody>
-                  <a:tcPr>
-                    <a:solidFill>
-                      <a:srgbClr val="FFFFFF"/>
-                    </a:solidFill>
-                  </a:tcPr>
-                </a:tc>
-                <a:tc>
-                  <a:txBody>
-                    <a:bodyPr/>
-                    <a:lstStyle/>
-                    <a:p>
-                      <a:r>
-                        <a:rPr sz="2000" b="0">
-                          <a:solidFill>
-                            <a:srgbClr val="1F2A44"/>
-                          </a:solidFill>
-                          <a:latin typeface="Nunito Sans"/>
-                        </a:rPr>
-                        <a:t>Muchos conductores creen conducir mejor que la mayoría</a:t>
-                      </a:r>
-                    </a:p>
-                  </a:txBody>
-                  <a:tcPr>
-                    <a:solidFill>
-                      <a:srgbClr val="FFFFFF"/>
-                    </a:solidFill>
-                  </a:tcPr>
-                </a:tc>
-              </a:tr>
-              <a:tr h="600000">
-                <a:tc>
-                  <a:txBody>
-                    <a:bodyPr/>
-                    <a:lstStyle/>
-                    <a:p>
-                      <a:r>
-                        <a:rPr sz="2000" b="0">
-                          <a:solidFill>
-                            <a:srgbClr val="1F2A44"/>
-                          </a:solidFill>
-                          <a:latin typeface="Nunito Sans"/>
-                        </a:rPr>
-                        <a:t>Planear sin margen</a:t>
-                      </a:r>
-                    </a:p>
-                  </a:txBody>
-                  <a:tcPr>
-                    <a:solidFill>
-                      <a:srgbClr val="EAF0F7"/>
-                    </a:solidFill>
-                  </a:tcPr>
-                </a:tc>
-                <a:tc>
-                  <a:txBody>
-                    <a:bodyPr/>
-                    <a:lstStyle/>
-                    <a:p>
-                      <a:r>
-                        <a:rPr sz="2000" b="0">
-                          <a:solidFill>
-                            <a:srgbClr val="1F2A44"/>
-                          </a:solidFill>
-                          <a:latin typeface="Nunito Sans"/>
-                        </a:rPr>
-                        <a:t>«Hago el trabajo en una tarde»… y tardo tres</a:t>
-                      </a:r>
-                    </a:p>
-                  </a:txBody>
-                  <a:tcPr>
-                    <a:solidFill>
-                      <a:srgbClr val="EAF0F7"/>
-                    </a:solidFill>
-                  </a:tcPr>
-                </a:tc>
-              </a:tr>
-              <a:tr h="600000">
-                <a:tc>
-                  <a:txBody>
-                    <a:bodyPr/>
-                    <a:lstStyle/>
-                    <a:p>
-                      <a:r>
-                        <a:rPr sz="2000" b="0">
-                          <a:solidFill>
-                            <a:srgbClr val="1F2A44"/>
-                          </a:solidFill>
-                          <a:latin typeface="Nunito Sans"/>
-                        </a:rPr>
-                        <a:t>Estar seguro de una respuesta</a:t>
-                      </a:r>
-                    </a:p>
-                  </a:txBody>
-                  <a:tcPr>
-                    <a:solidFill>
-                      <a:srgbClr val="FFFFFF"/>
-                    </a:solidFill>
-                  </a:tcPr>
-                </a:tc>
-                <a:tc>
-                  <a:txBody>
-                    <a:bodyPr/>
-                    <a:lstStyle/>
-                    <a:p>
-                      <a:r>
-                        <a:rPr sz="2000" b="0">
-                          <a:solidFill>
-                            <a:srgbClr val="1F2A44"/>
-                          </a:solidFill>
-                          <a:latin typeface="Nunito Sans"/>
-                        </a:rPr>
-                        <a:t>«Lo sé al 100 %»… y fallo</a:t>
-                      </a:r>
-                    </a:p>
-                  </a:txBody>
-                  <a:tcPr>
-                    <a:solidFill>
-                      <a:srgbClr val="FFFFFF"/>
-                    </a:solidFill>
-                  </a:tcPr>
-                </a:tc>
-              </a:tr>
-            </a:tbl>
-          </a:graphicData>
-        </a:graphic>
-      </p:graphicFrame>
+        </p:nvSpPr>
+        <p:spPr>
+          <a:xfrm>
+            <a:off x="640000" y="1650000"/>
+            <a:ext cx="10912000" cy="1150000"/>
+          </a:xfrm>
+          <a:prstGeom prst="rect">
+            <a:avLst/>
+          </a:prstGeom>
+          <a:solidFill>
+            <a:srgbClr val="EAF0F7"/>
+          </a:solidFill>
+          <a:ln>
+            <a:noFill/>
+          </a:ln>
+        </p:spPr>
+        <p:style>
+          <a:lnRef idx="1">
+            <a:schemeClr val="accent1"/>
+          </a:lnRef>
+          <a:fillRef idx="3">
+            <a:schemeClr val="accent1"/>
+          </a:fillRef>
+          <a:effectRef idx="2">
+            <a:schemeClr val="accent1"/>
+          </a:effectRef>
+          <a:fontRef idx="minor">
+            <a:schemeClr val="lt1"/>
+          </a:fontRef>
+        </p:style>
+        <p:txBody>
+          <a:bodyPr rtlCol="0" anchor="ctr"/>
+          <a:lstStyle/>
+          <a:p>
+            <a:pPr algn="ctr"/>
+          </a:p>
+        </p:txBody>
+      </p:sp>
+      <p:sp>
+        <p:nvSpPr>
+          <p:cNvPr id="5" name="TextBox 4"/>
+          <p:cNvSpPr txBox="1"/>
+          <p:nvPr/>
+        </p:nvSpPr>
+        <p:spPr>
+          <a:xfrm>
+            <a:off x="840000" y="1730000"/>
+            <a:ext cx="10512000" cy="1000000"/>
+          </a:xfrm>
+          <a:prstGeom prst="rect">
+            <a:avLst/>
+          </a:prstGeom>
+          <a:noFill/>
+        </p:spPr>
+        <p:txBody>
+          <a:bodyPr wrap="square" anchor="ctr">
+            <a:spAutoFit/>
+          </a:bodyPr>
+          <a:lstStyle/>
+          <a:p>
+            <a:pPr>
+              <a:spcAft>
+                <a:spcPts val="1260"/>
+              </a:spcAft>
+            </a:pPr>
+            <a:r>
+              <a:rPr sz="2800" b="1">
+                <a:solidFill>
+                  <a:srgbClr val="1F2A44"/>
+                </a:solidFill>
+                <a:latin typeface="Nunito Sans"/>
+              </a:rPr>
+              <a:t>El encuadre es la forma de presentar un dato. El mismo dato, dicho de otra manera, cambia lo que elegimos.</a:t>
+            </a:r>
+          </a:p>
+        </p:txBody>
+      </p:sp>
+      <p:sp>
+        <p:nvSpPr>
+          <p:cNvPr id="6" name="TextBox 5"/>
+          <p:cNvSpPr txBox="1"/>
+          <p:nvPr/>
+        </p:nvSpPr>
+        <p:spPr>
+          <a:xfrm>
+            <a:off x="640000" y="3000000"/>
+            <a:ext cx="10912000" cy="3458000"/>
+          </a:xfrm>
+          <a:prstGeom prst="rect">
+            <a:avLst/>
+          </a:prstGeom>
+          <a:noFill/>
+        </p:spPr>
+        <p:txBody>
+          <a:bodyPr wrap="square">
+            <a:spAutoFit/>
+          </a:bodyPr>
+          <a:lstStyle/>
+          <a:p>
+            <a:pPr>
+              <a:spcAft>
+                <a:spcPts val="1260"/>
+              </a:spcAft>
+            </a:pPr>
+            <a:r>
+              <a:rPr sz="2800" b="1">
+                <a:solidFill>
+                  <a:srgbClr val="E8793A"/>
+                </a:solidFill>
+                <a:latin typeface="Nunito Sans"/>
+              </a:rPr>
+              <a:t>• </a:t>
+            </a:r>
+            <a:r>
+              <a:rPr sz="2800" b="1">
+                <a:solidFill>
+                  <a:srgbClr val="1F2A44"/>
+                </a:solidFill>
+                <a:latin typeface="Nunito Sans"/>
+              </a:rPr>
+              <a:t>Encuadre:</a:t>
+            </a:r>
+            <a:r>
+              <a:rPr sz="2800" b="0">
+                <a:solidFill>
+                  <a:srgbClr val="1F2A44"/>
+                </a:solidFill>
+                <a:latin typeface="Nunito Sans"/>
+              </a:rPr>
+              <a:t> el marco, como el de una foto</a:t>
+            </a:r>
+          </a:p>
+          <a:p>
+            <a:pPr>
+              <a:spcAft>
+                <a:spcPts val="1260"/>
+              </a:spcAft>
+            </a:pPr>
+            <a:r>
+              <a:rPr sz="2800" b="1">
+                <a:solidFill>
+                  <a:srgbClr val="E8793A"/>
+                </a:solidFill>
+                <a:latin typeface="Nunito Sans"/>
+              </a:rPr>
+              <a:t>• </a:t>
+            </a:r>
+            <a:r>
+              <a:rPr sz="2800" b="0">
+                <a:solidFill>
+                  <a:srgbClr val="1F2A44"/>
+                </a:solidFill>
+                <a:latin typeface="Nunito Sans"/>
+              </a:rPr>
+              <a:t>«90 % sobreviven» y «10 % mueren» dicen lo mismo</a:t>
+            </a:r>
+          </a:p>
+          <a:p>
+            <a:pPr>
+              <a:spcAft>
+                <a:spcPts val="1260"/>
+              </a:spcAft>
+            </a:pPr>
+            <a:r>
+              <a:rPr sz="2800" b="1">
+                <a:solidFill>
+                  <a:srgbClr val="E8793A"/>
+                </a:solidFill>
+                <a:latin typeface="Nunito Sans"/>
+              </a:rPr>
+              <a:t>• </a:t>
+            </a:r>
+            <a:r>
+              <a:rPr sz="2800" b="0">
+                <a:solidFill>
+                  <a:srgbClr val="1F2A44"/>
+                </a:solidFill>
+                <a:latin typeface="Nunito Sans"/>
+              </a:rPr>
+              <a:t>Pero con la primera frase más gente elige operarse</a:t>
+            </a:r>
+          </a:p>
+        </p:txBody>
+      </p:sp>
     </p:spTree>
   </p:cSld>
   <p:clrMapOvr>
@@ -7240,7 +7253,7 @@
                 </a:solidFill>
                 <a:latin typeface="Nunito Sans"/>
               </a:rPr>
-              <a:t>BLOQUE 1 · MÁS SEGUROS QUE SABIOS</a:t>
+              <a:t>BLOQUE 1 · EL PRIMER NÚMERO Y LA FORMA DE DECIRLO</a:t>
             </a:r>
           </a:p>
         </p:txBody>
@@ -7279,243 +7292,310 @@
                 </a:solidFill>
                 <a:latin typeface="Fredoka"/>
               </a:rPr>
-              <a:t>El efecto Dunning-Kruger, con cuidado</a:t>
-            </a:r>
-          </a:p>
-        </p:txBody>
-      </p:sp>
-      <p:sp>
-        <p:nvSpPr>
-          <p:cNvPr id="4" name="Rectangle 3"/>
-          <p:cNvSpPr/>
+              <a:t>Mismo dato, distinto encuadre</a:t>
+            </a:r>
+          </a:p>
+        </p:txBody>
+      </p:sp>
+      <p:graphicFrame>
+        <p:nvGraphicFramePr>
+          <p:cNvPr id="4" name="Table 3"/>
+          <p:cNvGraphicFramePr>
+            <a:graphicFrameLocks noGrp="1"/>
+          </p:cNvGraphicFramePr>
           <p:nvPr/>
-        </p:nvSpPr>
-        <p:spPr>
-          <a:xfrm>
-            <a:off x="640000" y="1650000"/>
-            <a:ext cx="10912000" cy="1150000"/>
-          </a:xfrm>
-          <a:prstGeom prst="rect">
-            <a:avLst/>
-          </a:prstGeom>
-          <a:solidFill>
-            <a:srgbClr val="EAF0F7"/>
-          </a:solidFill>
-          <a:ln>
-            <a:noFill/>
-          </a:ln>
-        </p:spPr>
-        <p:style>
-          <a:lnRef idx="1">
-            <a:schemeClr val="accent1"/>
-          </a:lnRef>
-          <a:fillRef idx="3">
-            <a:schemeClr val="accent1"/>
-          </a:fillRef>
-          <a:effectRef idx="2">
-            <a:schemeClr val="accent1"/>
-          </a:effectRef>
-          <a:fontRef idx="minor">
-            <a:schemeClr val="lt1"/>
-          </a:fontRef>
-        </p:style>
-        <p:txBody>
-          <a:bodyPr rtlCol="0" anchor="ctr"/>
-          <a:lstStyle/>
-          <a:p>
-            <a:pPr algn="ctr"/>
-          </a:p>
-        </p:txBody>
-      </p:sp>
-      <p:sp>
-        <p:nvSpPr>
-          <p:cNvPr id="5" name="TextBox 4"/>
-          <p:cNvSpPr txBox="1"/>
-          <p:nvPr/>
-        </p:nvSpPr>
-        <p:spPr>
-          <a:xfrm>
-            <a:off x="840000" y="1730000"/>
-            <a:ext cx="10512000" cy="1000000"/>
-          </a:xfrm>
-          <a:prstGeom prst="rect">
-            <a:avLst/>
-          </a:prstGeom>
-          <a:noFill/>
-        </p:spPr>
-        <p:txBody>
-          <a:bodyPr wrap="square" anchor="ctr">
-            <a:spAutoFit/>
-          </a:bodyPr>
-          <a:lstStyle/>
-          <a:p>
-            <a:pPr>
-              <a:spcAft>
-                <a:spcPts val="1260"/>
-              </a:spcAft>
-            </a:pPr>
-            <a:r>
-              <a:rPr sz="2800" b="1">
-                <a:solidFill>
-                  <a:srgbClr val="1F2A44"/>
-                </a:solidFill>
-                <a:latin typeface="Nunito Sans"/>
-              </a:rPr>
-              <a:t>En un estudio de 1999, quienes peor lo hacían en una prueba solían creer que lo habían hecho mejor que la media.</a:t>
-            </a:r>
-          </a:p>
-        </p:txBody>
-      </p:sp>
-      <p:sp>
-        <p:nvSpPr>
-          <p:cNvPr id="6" name="TextBox 5"/>
-          <p:cNvSpPr txBox="1"/>
-          <p:nvPr/>
-        </p:nvSpPr>
-        <p:spPr>
-          <a:xfrm>
-            <a:off x="640000" y="3000000"/>
-            <a:ext cx="10912000" cy="3458000"/>
-          </a:xfrm>
-          <a:prstGeom prst="rect">
-            <a:avLst/>
-          </a:prstGeom>
-          <a:noFill/>
-        </p:spPr>
-        <p:txBody>
-          <a:bodyPr wrap="square">
-            <a:spAutoFit/>
-          </a:bodyPr>
-          <a:lstStyle/>
-          <a:p>
-            <a:pPr>
-              <a:spcAft>
-                <a:spcPts val="1260"/>
-              </a:spcAft>
-            </a:pPr>
-            <a:r>
-              <a:rPr sz="2800" b="1">
-                <a:solidFill>
-                  <a:srgbClr val="E8793A"/>
-                </a:solidFill>
-                <a:latin typeface="Nunito Sans"/>
-              </a:rPr>
-              <a:t>• </a:t>
-            </a:r>
-            <a:r>
-              <a:rPr sz="2800" b="0">
-                <a:solidFill>
-                  <a:srgbClr val="1F2A44"/>
-                </a:solidFill>
-                <a:latin typeface="Nunito Sans"/>
-              </a:rPr>
-              <a:t>Quien sabe poco de algo a menudo </a:t>
-            </a:r>
-            <a:r>
-              <a:rPr sz="2800" b="1">
-                <a:solidFill>
-                  <a:srgbClr val="1F2A44"/>
-                </a:solidFill>
-                <a:latin typeface="Nunito Sans"/>
-              </a:rPr>
-              <a:t>no ve</a:t>
-            </a:r>
-            <a:r>
-              <a:rPr sz="2800" b="0">
-                <a:solidFill>
-                  <a:srgbClr val="1F2A44"/>
-                </a:solidFill>
-                <a:latin typeface="Nunito Sans"/>
-              </a:rPr>
-              <a:t> sus errores</a:t>
-            </a:r>
-          </a:p>
-          <a:p>
-            <a:pPr>
-              <a:spcAft>
-                <a:spcPts val="1260"/>
-              </a:spcAft>
-            </a:pPr>
-            <a:r>
-              <a:rPr sz="2800" b="1">
-                <a:solidFill>
-                  <a:srgbClr val="E8793A"/>
-                </a:solidFill>
-                <a:latin typeface="Nunito Sans"/>
-              </a:rPr>
-              <a:t>• </a:t>
-            </a:r>
-            <a:r>
-              <a:rPr sz="2800" b="0">
-                <a:solidFill>
-                  <a:srgbClr val="1F2A44"/>
-                </a:solidFill>
-                <a:latin typeface="Nunito Sans"/>
-              </a:rPr>
-              <a:t>Los mejores, en cambio, se valoraban un poco por debajo</a:t>
-            </a:r>
-          </a:p>
-          <a:p>
-            <a:pPr>
-              <a:spcAft>
-                <a:spcPts val="1260"/>
-              </a:spcAft>
-            </a:pPr>
-            <a:r>
-              <a:rPr sz="2800" b="1">
-                <a:solidFill>
-                  <a:srgbClr val="E8793A"/>
-                </a:solidFill>
-                <a:latin typeface="Nunito Sans"/>
-              </a:rPr>
-              <a:t>• </a:t>
-            </a:r>
-            <a:r>
-              <a:rPr sz="2800" b="1">
-                <a:solidFill>
-                  <a:srgbClr val="1F2A44"/>
-                </a:solidFill>
-                <a:latin typeface="Nunito Sans"/>
-              </a:rPr>
-              <a:t>Ojo:</a:t>
-            </a:r>
-            <a:r>
-              <a:rPr sz="2800" b="0">
-                <a:solidFill>
-                  <a:srgbClr val="1F2A44"/>
-                </a:solidFill>
-                <a:latin typeface="Nunito Sans"/>
-              </a:rPr>
-              <a:t> no dice que quien sabe poco se crea un genio</a:t>
-            </a:r>
-          </a:p>
-          <a:p>
-            <a:pPr>
-              <a:spcAft>
-                <a:spcPts val="1260"/>
-              </a:spcAft>
-            </a:pPr>
-            <a:r>
-              <a:rPr sz="2800" b="1">
-                <a:solidFill>
-                  <a:srgbClr val="E8793A"/>
-                </a:solidFill>
-                <a:latin typeface="Nunito Sans"/>
-              </a:rPr>
-              <a:t>• </a:t>
-            </a:r>
-            <a:r>
-              <a:rPr sz="2800" b="0">
-                <a:solidFill>
-                  <a:srgbClr val="1F2A44"/>
-                </a:solidFill>
-                <a:latin typeface="Nunito Sans"/>
-              </a:rPr>
-              <a:t>Se discute: parte puede ser un efecto de la estadística</a:t>
-            </a:r>
-          </a:p>
-        </p:txBody>
-      </p:sp>
+        </p:nvGraphicFramePr>
+        <p:xfrm>
+          <a:off x="640000" y="1700000"/>
+          <a:ext cx="10912000" cy="2400000"/>
+        </p:xfrm>
+        <a:graphic>
+          <a:graphicData uri="http://schemas.openxmlformats.org/drawingml/2006/table">
+            <a:tbl>
+              <a:tblPr firstRow="1" bandRow="1">
+                <a:tableStyleId>{5C22544A-7EE6-4342-B048-85BDC9FD1C3A}</a:tableStyleId>
+              </a:tblPr>
+              <a:tblGrid>
+                <a:gridCol w="3637333"/>
+                <a:gridCol w="3637333"/>
+                <a:gridCol w="3637334"/>
+              </a:tblGrid>
+              <a:tr h="600000">
+                <a:tc>
+                  <a:txBody>
+                    <a:bodyPr/>
+                    <a:lstStyle/>
+                    <a:p>
+                      <a:r>
+                        <a:rPr sz="2000" b="1">
+                          <a:solidFill>
+                            <a:srgbClr val="FBF7EF"/>
+                          </a:solidFill>
+                          <a:latin typeface="Fredoka"/>
+                        </a:rPr>
+                        <a:t>Dicho así…</a:t>
+                      </a:r>
+                    </a:p>
+                  </a:txBody>
+                  <a:tcPr>
+                    <a:solidFill>
+                      <a:srgbClr val="1F2A44"/>
+                    </a:solidFill>
+                  </a:tcPr>
+                </a:tc>
+                <a:tc>
+                  <a:txBody>
+                    <a:bodyPr/>
+                    <a:lstStyle/>
+                    <a:p>
+                      <a:r>
+                        <a:rPr sz="2000" b="1">
+                          <a:solidFill>
+                            <a:srgbClr val="FBF7EF"/>
+                          </a:solidFill>
+                          <a:latin typeface="Fredoka"/>
+                        </a:rPr>
+                        <a:t>…o así</a:t>
+                      </a:r>
+                    </a:p>
+                  </a:txBody>
+                  <a:tcPr>
+                    <a:solidFill>
+                      <a:srgbClr val="1F2A44"/>
+                    </a:solidFill>
+                  </a:tcPr>
+                </a:tc>
+                <a:tc>
+                  <a:txBody>
+                    <a:bodyPr/>
+                    <a:lstStyle/>
+                    <a:p>
+                      <a:r>
+                        <a:rPr sz="2000" b="1">
+                          <a:solidFill>
+                            <a:srgbClr val="FBF7EF"/>
+                          </a:solidFill>
+                          <a:latin typeface="Fredoka"/>
+                        </a:rPr>
+                        <a:t>¿Cuál suena mejor?</a:t>
+                      </a:r>
+                    </a:p>
+                  </a:txBody>
+                  <a:tcPr>
+                    <a:solidFill>
+                      <a:srgbClr val="1F2A44"/>
+                    </a:solidFill>
+                  </a:tcPr>
+                </a:tc>
+              </a:tr>
+              <a:tr h="600000">
+                <a:tc>
+                  <a:txBody>
+                    <a:bodyPr/>
+                    <a:lstStyle/>
+                    <a:p>
+                      <a:r>
+                        <a:rPr sz="2000" b="0">
+                          <a:solidFill>
+                            <a:srgbClr val="1F2A44"/>
+                          </a:solidFill>
+                          <a:latin typeface="Nunito Sans"/>
+                        </a:rPr>
+                        <a:t>«Carne 75 % sin grasa»</a:t>
+                      </a:r>
+                    </a:p>
+                  </a:txBody>
+                  <a:tcPr>
+                    <a:solidFill>
+                      <a:srgbClr val="FFFFFF"/>
+                    </a:solidFill>
+                  </a:tcPr>
+                </a:tc>
+                <a:tc>
+                  <a:txBody>
+                    <a:bodyPr/>
+                    <a:lstStyle/>
+                    <a:p>
+                      <a:r>
+                        <a:rPr sz="2000" b="0">
+                          <a:solidFill>
+                            <a:srgbClr val="1F2A44"/>
+                          </a:solidFill>
+                          <a:latin typeface="Nunito Sans"/>
+                        </a:rPr>
+                        <a:t>«Carne con 25 % de grasa»</a:t>
+                      </a:r>
+                    </a:p>
+                  </a:txBody>
+                  <a:tcPr>
+                    <a:solidFill>
+                      <a:srgbClr val="FFFFFF"/>
+                    </a:solidFill>
+                  </a:tcPr>
+                </a:tc>
+                <a:tc>
+                  <a:txBody>
+                    <a:bodyPr/>
+                    <a:lstStyle/>
+                    <a:p>
+                      <a:r>
+                        <a:rPr sz="2000" b="0">
+                          <a:solidFill>
+                            <a:srgbClr val="1F2A44"/>
+                          </a:solidFill>
+                          <a:latin typeface="Nunito Sans"/>
+                        </a:rPr>
+                        <a:t>La primera, aunque es igual</a:t>
+                      </a:r>
+                    </a:p>
+                  </a:txBody>
+                  <a:tcPr>
+                    <a:solidFill>
+                      <a:srgbClr val="FFFFFF"/>
+                    </a:solidFill>
+                  </a:tcPr>
+                </a:tc>
+              </a:tr>
+              <a:tr h="600000">
+                <a:tc>
+                  <a:txBody>
+                    <a:bodyPr/>
+                    <a:lstStyle/>
+                    <a:p>
+                      <a:r>
+                        <a:rPr sz="2000" b="0">
+                          <a:solidFill>
+                            <a:srgbClr val="1F2A44"/>
+                          </a:solidFill>
+                          <a:latin typeface="Nunito Sans"/>
+                        </a:rPr>
+                        <a:t>«Aprobó el 75 % de la clase»</a:t>
+                      </a:r>
+                    </a:p>
+                  </a:txBody>
+                  <a:tcPr>
+                    <a:solidFill>
+                      <a:srgbClr val="EAF0F7"/>
+                    </a:solidFill>
+                  </a:tcPr>
+                </a:tc>
+                <a:tc>
+                  <a:txBody>
+                    <a:bodyPr/>
+                    <a:lstStyle/>
+                    <a:p>
+                      <a:r>
+                        <a:rPr sz="2000" b="0">
+                          <a:solidFill>
+                            <a:srgbClr val="1F2A44"/>
+                          </a:solidFill>
+                          <a:latin typeface="Nunito Sans"/>
+                        </a:rPr>
+                        <a:t>«Suspendió 1 de cada 4»</a:t>
+                      </a:r>
+                    </a:p>
+                  </a:txBody>
+                  <a:tcPr>
+                    <a:solidFill>
+                      <a:srgbClr val="EAF0F7"/>
+                    </a:solidFill>
+                  </a:tcPr>
+                </a:tc>
+                <a:tc>
+                  <a:txBody>
+                    <a:bodyPr/>
+                    <a:lstStyle/>
+                    <a:p>
+                      <a:r>
+                        <a:rPr sz="2000" b="0">
+                          <a:solidFill>
+                            <a:srgbClr val="1F2A44"/>
+                          </a:solidFill>
+                          <a:latin typeface="Nunito Sans"/>
+                        </a:rPr>
+                        <a:t>La primera, aunque es igual</a:t>
+                      </a:r>
+                    </a:p>
+                  </a:txBody>
+                  <a:tcPr>
+                    <a:solidFill>
+                      <a:srgbClr val="EAF0F7"/>
+                    </a:solidFill>
+                  </a:tcPr>
+                </a:tc>
+              </a:tr>
+              <a:tr h="600000">
+                <a:tc>
+                  <a:txBody>
+                    <a:bodyPr/>
+                    <a:lstStyle/>
+                    <a:p>
+                      <a:r>
+                        <a:rPr sz="2000" b="0">
+                          <a:solidFill>
+                            <a:srgbClr val="1F2A44"/>
+                          </a:solidFill>
+                          <a:latin typeface="Nunito Sans"/>
+                        </a:rPr>
+                        <a:t>«El 90 % sobrevive a la operación»</a:t>
+                      </a:r>
+                    </a:p>
+                  </a:txBody>
+                  <a:tcPr>
+                    <a:solidFill>
+                      <a:srgbClr val="FFFFFF"/>
+                    </a:solidFill>
+                  </a:tcPr>
+                </a:tc>
+                <a:tc>
+                  <a:txBody>
+                    <a:bodyPr/>
+                    <a:lstStyle/>
+                    <a:p>
+                      <a:r>
+                        <a:rPr sz="2000" b="0">
+                          <a:solidFill>
+                            <a:srgbClr val="1F2A44"/>
+                          </a:solidFill>
+                          <a:latin typeface="Nunito Sans"/>
+                        </a:rPr>
+                        <a:t>«El 10 % muere en la operación»</a:t>
+                      </a:r>
+                    </a:p>
+                  </a:txBody>
+                  <a:tcPr>
+                    <a:solidFill>
+                      <a:srgbClr val="FFFFFF"/>
+                    </a:solidFill>
+                  </a:tcPr>
+                </a:tc>
+                <a:tc>
+                  <a:txBody>
+                    <a:bodyPr/>
+                    <a:lstStyle/>
+                    <a:p>
+                      <a:r>
+                        <a:rPr sz="2000" b="0">
+                          <a:solidFill>
+                            <a:srgbClr val="1F2A44"/>
+                          </a:solidFill>
+                          <a:latin typeface="Nunito Sans"/>
+                        </a:rPr>
+                        <a:t>La primera: más gente la elige</a:t>
+                      </a:r>
+                    </a:p>
+                  </a:txBody>
+                  <a:tcPr>
+                    <a:solidFill>
+                      <a:srgbClr val="FFFFFF"/>
+                    </a:solidFill>
+                  </a:tcPr>
+                </a:tc>
+              </a:tr>
+            </a:tbl>
+          </a:graphicData>
+        </a:graphic>
+      </p:graphicFrame>
     </p:spTree>
   </p:cSld>
   <p:clrMapOvr>
